--- a/knf-onboarding-ai-training/한전원자력연료_신입직원_입문교육_생성형AI_보고서작성.pptx
+++ b/knf-onboarding-ai-training/한전원자력연료_신입직원_입문교육_생성형AI_보고서작성.pptx
@@ -30978,7 +30978,29 @@
                 <a:ea typeface="맑은 고딕"/>
                 <a:cs typeface="맑은 고딕"/>
               </a:rPr>
-              <a:t>조별로 미션 1개를 골라 ‘원페이지 보고서’로 설계하세요. (실제 업무 상황으로 바꿔도 OK)</a:t>
+              <a:t>조별로 미션 1개를 골라 </a:t>
+            </a:r>
+            <a:r>
+              <a:rPr sz="1100" b="1">
+                <a:solidFill>
+                  <a:srgbClr val="E87A2B"/>
+                </a:solidFill>
+                <a:latin typeface="맑은 고딕"/>
+                <a:ea typeface="맑은 고딕"/>
+                <a:cs typeface="맑은 고딕"/>
+              </a:rPr>
+              <a:t>자유롭게 토론하며 </a:t>
+            </a:r>
+            <a:r>
+              <a:rPr sz="1100" b="0">
+                <a:solidFill>
+                  <a:srgbClr val="1B2738"/>
+                </a:solidFill>
+                <a:latin typeface="맑은 고딕"/>
+                <a:ea typeface="맑은 고딕"/>
+                <a:cs typeface="맑은 고딕"/>
+              </a:rPr>
+              <a:t>‘원페이지 보고서’로 완성하세요. (실제 상황으로 바꿔도 OK)</a:t>
             </a:r>
           </a:p>
         </p:txBody>
@@ -30991,8 +31013,8 @@
         </p:nvSpPr>
         <p:spPr>
           <a:xfrm>
-            <a:off x="457200" y="2331720"/>
-            <a:ext cx="2880360" cy="2514600"/>
+            <a:off x="457200" y="2194560"/>
+            <a:ext cx="2880360" cy="2103120"/>
           </a:xfrm>
           <a:prstGeom prst="roundRect">
             <a:avLst>
@@ -31046,8 +31068,8 @@
         </p:nvSpPr>
         <p:spPr>
           <a:xfrm>
-            <a:off x="457200" y="2331720"/>
-            <a:ext cx="2880360" cy="512064"/>
+            <a:off x="457200" y="2194560"/>
+            <a:ext cx="2880360" cy="457200"/>
           </a:xfrm>
           <a:prstGeom prst="round2SameRect">
             <a:avLst>
@@ -31093,8 +31115,8 @@
         </p:nvSpPr>
         <p:spPr>
           <a:xfrm>
-            <a:off x="658368" y="2441448"/>
-            <a:ext cx="2478024" cy="310896"/>
+            <a:off x="640080" y="2276856"/>
+            <a:ext cx="2514600" cy="292608"/>
           </a:xfrm>
           <a:prstGeom prst="rect">
             <a:avLst/>
@@ -31119,7 +31141,7 @@
               </a:spcAft>
             </a:pPr>
             <a:r>
-              <a:rPr sz="1100" b="1">
+              <a:rPr sz="1050" b="1">
                 <a:solidFill>
                   <a:srgbClr val="E87A2B"/>
                 </a:solidFill>
@@ -31140,8 +31162,8 @@
         </p:nvSpPr>
         <p:spPr>
           <a:xfrm>
-            <a:off x="658368" y="3081528"/>
-            <a:ext cx="2478024" cy="640080"/>
+            <a:off x="640080" y="2798064"/>
+            <a:ext cx="2514600" cy="603504"/>
           </a:xfrm>
           <a:prstGeom prst="rect">
             <a:avLst/>
@@ -31166,7 +31188,7 @@
               </a:spcAft>
             </a:pPr>
             <a:r>
-              <a:rPr sz="1400" b="1">
+              <a:rPr sz="1300" b="1">
                 <a:solidFill>
                   <a:srgbClr val="0F2444"/>
                 </a:solidFill>
@@ -31187,8 +31209,8 @@
         </p:nvSpPr>
         <p:spPr>
           <a:xfrm>
-            <a:off x="658368" y="3813048"/>
-            <a:ext cx="1965960" cy="36576"/>
+            <a:off x="640080" y="3511296"/>
+            <a:ext cx="1965960" cy="32004"/>
           </a:xfrm>
           <a:prstGeom prst="rect">
             <a:avLst/>
@@ -31231,8 +31253,8 @@
         </p:nvSpPr>
         <p:spPr>
           <a:xfrm>
-            <a:off x="658368" y="3977640"/>
-            <a:ext cx="2478024" cy="731520"/>
+            <a:off x="640080" y="3657600"/>
+            <a:ext cx="2514600" cy="603504"/>
           </a:xfrm>
           <a:prstGeom prst="rect">
             <a:avLst/>
@@ -31247,17 +31269,17 @@
           <a:p>
             <a:pPr algn="l">
               <a:lnSpc>
-                <a:spcPct val="120000"/>
-              </a:lnSpc>
-              <a:spcBef>
-                <a:spcPts val="0"/>
-              </a:spcBef>
-              <a:spcAft>
-                <a:spcPts val="200"/>
-              </a:spcAft>
-            </a:pPr>
-            <a:r>
-              <a:rPr sz="1050" b="0">
+                <a:spcPct val="115000"/>
+              </a:lnSpc>
+              <a:spcBef>
+                <a:spcPts val="0"/>
+              </a:spcBef>
+              <a:spcAft>
+                <a:spcPts val="200"/>
+              </a:spcAft>
+            </a:pPr>
+            <a:r>
+              <a:rPr sz="1000" b="0">
                 <a:solidFill>
                   <a:srgbClr val="5C6B80"/>
                 </a:solidFill>
@@ -31278,8 +31300,8 @@
         </p:nvSpPr>
         <p:spPr>
           <a:xfrm>
-            <a:off x="3520440" y="2331720"/>
-            <a:ext cx="2880360" cy="2514600"/>
+            <a:off x="3520440" y="2194560"/>
+            <a:ext cx="2880360" cy="2103120"/>
           </a:xfrm>
           <a:prstGeom prst="roundRect">
             <a:avLst>
@@ -31333,8 +31355,8 @@
         </p:nvSpPr>
         <p:spPr>
           <a:xfrm>
-            <a:off x="3520440" y="2331720"/>
-            <a:ext cx="2880360" cy="512064"/>
+            <a:off x="3520440" y="2194560"/>
+            <a:ext cx="2880360" cy="457200"/>
           </a:xfrm>
           <a:prstGeom prst="round2SameRect">
             <a:avLst>
@@ -31380,8 +31402,8 @@
         </p:nvSpPr>
         <p:spPr>
           <a:xfrm>
-            <a:off x="3721608" y="2441448"/>
-            <a:ext cx="2478024" cy="310896"/>
+            <a:off x="3703320" y="2276856"/>
+            <a:ext cx="2514600" cy="292608"/>
           </a:xfrm>
           <a:prstGeom prst="rect">
             <a:avLst/>
@@ -31406,7 +31428,7 @@
               </a:spcAft>
             </a:pPr>
             <a:r>
-              <a:rPr sz="1100" b="1">
+              <a:rPr sz="1050" b="1">
                 <a:solidFill>
                   <a:srgbClr val="E87A2B"/>
                 </a:solidFill>
@@ -31427,8 +31449,8 @@
         </p:nvSpPr>
         <p:spPr>
           <a:xfrm>
-            <a:off x="3721608" y="3081528"/>
-            <a:ext cx="2478024" cy="640080"/>
+            <a:off x="3703320" y="2798064"/>
+            <a:ext cx="2514600" cy="603504"/>
           </a:xfrm>
           <a:prstGeom prst="rect">
             <a:avLst/>
@@ -31453,7 +31475,7 @@
               </a:spcAft>
             </a:pPr>
             <a:r>
-              <a:rPr sz="1400" b="1">
+              <a:rPr sz="1300" b="1">
                 <a:solidFill>
                   <a:srgbClr val="0F2444"/>
                 </a:solidFill>
@@ -31474,8 +31496,8 @@
         </p:nvSpPr>
         <p:spPr>
           <a:xfrm>
-            <a:off x="3721608" y="3813048"/>
-            <a:ext cx="1965960" cy="36576"/>
+            <a:off x="3703320" y="3511296"/>
+            <a:ext cx="1965960" cy="32004"/>
           </a:xfrm>
           <a:prstGeom prst="rect">
             <a:avLst/>
@@ -31518,8 +31540,8 @@
         </p:nvSpPr>
         <p:spPr>
           <a:xfrm>
-            <a:off x="3721608" y="3977640"/>
-            <a:ext cx="2478024" cy="731520"/>
+            <a:off x="3703320" y="3657600"/>
+            <a:ext cx="2514600" cy="603504"/>
           </a:xfrm>
           <a:prstGeom prst="rect">
             <a:avLst/>
@@ -31534,17 +31556,17 @@
           <a:p>
             <a:pPr algn="l">
               <a:lnSpc>
-                <a:spcPct val="120000"/>
-              </a:lnSpc>
-              <a:spcBef>
-                <a:spcPts val="0"/>
-              </a:spcBef>
-              <a:spcAft>
-                <a:spcPts val="200"/>
-              </a:spcAft>
-            </a:pPr>
-            <a:r>
-              <a:rPr sz="1050" b="0">
+                <a:spcPct val="115000"/>
+              </a:lnSpc>
+              <a:spcBef>
+                <a:spcPts val="0"/>
+              </a:spcBef>
+              <a:spcAft>
+                <a:spcPts val="200"/>
+              </a:spcAft>
+            </a:pPr>
+            <a:r>
+              <a:rPr sz="1000" b="0">
                 <a:solidFill>
                   <a:srgbClr val="5C6B80"/>
                 </a:solidFill>
@@ -31565,8 +31587,8 @@
         </p:nvSpPr>
         <p:spPr>
           <a:xfrm>
-            <a:off x="457200" y="5074920"/>
-            <a:ext cx="2880360" cy="2514600"/>
+            <a:off x="457200" y="4434840"/>
+            <a:ext cx="2880360" cy="2103120"/>
           </a:xfrm>
           <a:prstGeom prst="roundRect">
             <a:avLst>
@@ -31620,8 +31642,8 @@
         </p:nvSpPr>
         <p:spPr>
           <a:xfrm>
-            <a:off x="457200" y="5074920"/>
-            <a:ext cx="2880360" cy="512064"/>
+            <a:off x="457200" y="4434840"/>
+            <a:ext cx="2880360" cy="457200"/>
           </a:xfrm>
           <a:prstGeom prst="round2SameRect">
             <a:avLst>
@@ -31667,8 +31689,8 @@
         </p:nvSpPr>
         <p:spPr>
           <a:xfrm>
-            <a:off x="658368" y="5184648"/>
-            <a:ext cx="2478024" cy="310896"/>
+            <a:off x="640080" y="4517136"/>
+            <a:ext cx="2514600" cy="292608"/>
           </a:xfrm>
           <a:prstGeom prst="rect">
             <a:avLst/>
@@ -31693,7 +31715,7 @@
               </a:spcAft>
             </a:pPr>
             <a:r>
-              <a:rPr sz="1100" b="1">
+              <a:rPr sz="1050" b="1">
                 <a:solidFill>
                   <a:srgbClr val="E87A2B"/>
                 </a:solidFill>
@@ -31714,8 +31736,8 @@
         </p:nvSpPr>
         <p:spPr>
           <a:xfrm>
-            <a:off x="658368" y="5824728"/>
-            <a:ext cx="2478024" cy="640080"/>
+            <a:off x="640080" y="5038344"/>
+            <a:ext cx="2514600" cy="603504"/>
           </a:xfrm>
           <a:prstGeom prst="rect">
             <a:avLst/>
@@ -31740,7 +31762,7 @@
               </a:spcAft>
             </a:pPr>
             <a:r>
-              <a:rPr sz="1400" b="1">
+              <a:rPr sz="1300" b="1">
                 <a:solidFill>
                   <a:srgbClr val="0F2444"/>
                 </a:solidFill>
@@ -31761,8 +31783,8 @@
         </p:nvSpPr>
         <p:spPr>
           <a:xfrm>
-            <a:off x="658368" y="6556248"/>
-            <a:ext cx="1965960" cy="36576"/>
+            <a:off x="640080" y="5751576"/>
+            <a:ext cx="1965960" cy="32004"/>
           </a:xfrm>
           <a:prstGeom prst="rect">
             <a:avLst/>
@@ -31805,8 +31827,8 @@
         </p:nvSpPr>
         <p:spPr>
           <a:xfrm>
-            <a:off x="658368" y="6720840"/>
-            <a:ext cx="2478024" cy="731520"/>
+            <a:off x="640080" y="5897880"/>
+            <a:ext cx="2514600" cy="603504"/>
           </a:xfrm>
           <a:prstGeom prst="rect">
             <a:avLst/>
@@ -31821,17 +31843,17 @@
           <a:p>
             <a:pPr algn="l">
               <a:lnSpc>
-                <a:spcPct val="120000"/>
-              </a:lnSpc>
-              <a:spcBef>
-                <a:spcPts val="0"/>
-              </a:spcBef>
-              <a:spcAft>
-                <a:spcPts val="200"/>
-              </a:spcAft>
-            </a:pPr>
-            <a:r>
-              <a:rPr sz="1050" b="0">
+                <a:spcPct val="115000"/>
+              </a:lnSpc>
+              <a:spcBef>
+                <a:spcPts val="0"/>
+              </a:spcBef>
+              <a:spcAft>
+                <a:spcPts val="200"/>
+              </a:spcAft>
+            </a:pPr>
+            <a:r>
+              <a:rPr sz="1000" b="0">
                 <a:solidFill>
                   <a:srgbClr val="5C6B80"/>
                 </a:solidFill>
@@ -31852,8 +31874,8 @@
         </p:nvSpPr>
         <p:spPr>
           <a:xfrm>
-            <a:off x="3520440" y="5074920"/>
-            <a:ext cx="2880360" cy="2514600"/>
+            <a:off x="3520440" y="4434840"/>
+            <a:ext cx="2880360" cy="2103120"/>
           </a:xfrm>
           <a:prstGeom prst="roundRect">
             <a:avLst>
@@ -31907,8 +31929,8 @@
         </p:nvSpPr>
         <p:spPr>
           <a:xfrm>
-            <a:off x="3520440" y="5074920"/>
-            <a:ext cx="2880360" cy="512064"/>
+            <a:off x="3520440" y="4434840"/>
+            <a:ext cx="2880360" cy="457200"/>
           </a:xfrm>
           <a:prstGeom prst="round2SameRect">
             <a:avLst>
@@ -31954,8 +31976,8 @@
         </p:nvSpPr>
         <p:spPr>
           <a:xfrm>
-            <a:off x="3721608" y="5184648"/>
-            <a:ext cx="2478024" cy="310896"/>
+            <a:off x="3703320" y="4517136"/>
+            <a:ext cx="2514600" cy="292608"/>
           </a:xfrm>
           <a:prstGeom prst="rect">
             <a:avLst/>
@@ -31980,7 +32002,7 @@
               </a:spcAft>
             </a:pPr>
             <a:r>
-              <a:rPr sz="1100" b="1">
+              <a:rPr sz="1050" b="1">
                 <a:solidFill>
                   <a:srgbClr val="E87A2B"/>
                 </a:solidFill>
@@ -32001,8 +32023,8 @@
         </p:nvSpPr>
         <p:spPr>
           <a:xfrm>
-            <a:off x="3721608" y="5824728"/>
-            <a:ext cx="2478024" cy="640080"/>
+            <a:off x="3703320" y="5038344"/>
+            <a:ext cx="2514600" cy="603504"/>
           </a:xfrm>
           <a:prstGeom prst="rect">
             <a:avLst/>
@@ -32027,7 +32049,7 @@
               </a:spcAft>
             </a:pPr>
             <a:r>
-              <a:rPr sz="1400" b="1">
+              <a:rPr sz="1300" b="1">
                 <a:solidFill>
                   <a:srgbClr val="0F2444"/>
                 </a:solidFill>
@@ -32048,8 +32070,8 @@
         </p:nvSpPr>
         <p:spPr>
           <a:xfrm>
-            <a:off x="3721608" y="6556248"/>
-            <a:ext cx="1965960" cy="36576"/>
+            <a:off x="3703320" y="5751576"/>
+            <a:ext cx="1965960" cy="32004"/>
           </a:xfrm>
           <a:prstGeom prst="rect">
             <a:avLst/>
@@ -32092,8 +32114,8 @@
         </p:nvSpPr>
         <p:spPr>
           <a:xfrm>
-            <a:off x="3721608" y="6720840"/>
-            <a:ext cx="2478024" cy="731520"/>
+            <a:off x="3703320" y="5897880"/>
+            <a:ext cx="2514600" cy="603504"/>
           </a:xfrm>
           <a:prstGeom prst="rect">
             <a:avLst/>
@@ -32108,17 +32130,17 @@
           <a:p>
             <a:pPr algn="l">
               <a:lnSpc>
-                <a:spcPct val="120000"/>
-              </a:lnSpc>
-              <a:spcBef>
-                <a:spcPts val="0"/>
-              </a:spcBef>
-              <a:spcAft>
-                <a:spcPts val="200"/>
-              </a:spcAft>
-            </a:pPr>
-            <a:r>
-              <a:rPr sz="1050" b="0">
+                <a:spcPct val="115000"/>
+              </a:lnSpc>
+              <a:spcBef>
+                <a:spcPts val="0"/>
+              </a:spcBef>
+              <a:spcAft>
+                <a:spcPts val="200"/>
+              </a:spcAft>
+            </a:pPr>
+            <a:r>
+              <a:rPr sz="1000" b="0">
                 <a:solidFill>
                   <a:srgbClr val="5C6B80"/>
                 </a:solidFill>
@@ -32133,7 +32155,581 @@
       </p:sp>
       <p:sp>
         <p:nvSpPr>
-          <p:cNvPr id="33" name="Rectangle 32"/>
+          <p:cNvPr id="33" name="Rounded Rectangle 32"/>
+          <p:cNvSpPr/>
+          <p:nvPr/>
+        </p:nvSpPr>
+        <p:spPr>
+          <a:xfrm>
+            <a:off x="457200" y="6675120"/>
+            <a:ext cx="2880360" cy="2103120"/>
+          </a:xfrm>
+          <a:prstGeom prst="roundRect">
+            <a:avLst>
+              <a:gd name="adj" fmla="val 5000"/>
+            </a:avLst>
+          </a:prstGeom>
+          <a:solidFill>
+            <a:srgbClr val="FFFFFF"/>
+          </a:solidFill>
+          <a:ln w="12700">
+            <a:solidFill>
+              <a:srgbClr val="D9E2EE"/>
+            </a:solidFill>
+          </a:ln>
+          <a:effectLst/>
+          <a:effectLst>
+            <a:outerShdw blurRad="80000" dist="38000" dir="5400000" rotWithShape="0">
+              <a:srgbClr val="1B2738">
+                <a:alpha val="18000"/>
+              </a:srgbClr>
+            </a:outerShdw>
+          </a:effectLst>
+        </p:spPr>
+        <p:style>
+          <a:lnRef idx="1">
+            <a:schemeClr val="accent1"/>
+          </a:lnRef>
+          <a:fillRef idx="3">
+            <a:schemeClr val="accent1"/>
+          </a:fillRef>
+          <a:effectRef idx="2">
+            <a:schemeClr val="accent1"/>
+          </a:effectRef>
+          <a:fontRef idx="minor">
+            <a:schemeClr val="lt1"/>
+          </a:fontRef>
+        </p:style>
+        <p:txBody>
+          <a:bodyPr rtlCol="0" anchor="ctr"/>
+          <a:lstStyle/>
+          <a:p>
+            <a:pPr algn="ctr"/>
+          </a:p>
+        </p:txBody>
+      </p:sp>
+      <p:sp>
+        <p:nvSpPr>
+          <p:cNvPr id="34" name="Round Same Side Corner Rectangle 33"/>
+          <p:cNvSpPr/>
+          <p:nvPr/>
+        </p:nvSpPr>
+        <p:spPr>
+          <a:xfrm>
+            <a:off x="457200" y="6675120"/>
+            <a:ext cx="2880360" cy="457200"/>
+          </a:xfrm>
+          <a:prstGeom prst="round2SameRect">
+            <a:avLst>
+              <a:gd name="adj1" fmla="val 35000"/>
+              <a:gd name="adj2" fmla="val 0"/>
+            </a:avLst>
+          </a:prstGeom>
+          <a:solidFill>
+            <a:srgbClr val="FCF0E4"/>
+          </a:solidFill>
+          <a:ln>
+            <a:noFill/>
+          </a:ln>
+          <a:effectLst/>
+        </p:spPr>
+        <p:style>
+          <a:lnRef idx="1">
+            <a:schemeClr val="accent1"/>
+          </a:lnRef>
+          <a:fillRef idx="3">
+            <a:schemeClr val="accent1"/>
+          </a:fillRef>
+          <a:effectRef idx="2">
+            <a:schemeClr val="accent1"/>
+          </a:effectRef>
+          <a:fontRef idx="minor">
+            <a:schemeClr val="lt1"/>
+          </a:fontRef>
+        </p:style>
+        <p:txBody>
+          <a:bodyPr rtlCol="0" anchor="ctr"/>
+          <a:lstStyle/>
+          <a:p>
+            <a:pPr algn="ctr"/>
+          </a:p>
+        </p:txBody>
+      </p:sp>
+      <p:sp>
+        <p:nvSpPr>
+          <p:cNvPr id="35" name="TextBox 34"/>
+          <p:cNvSpPr txBox="1"/>
+          <p:nvPr/>
+        </p:nvSpPr>
+        <p:spPr>
+          <a:xfrm>
+            <a:off x="640080" y="6757416"/>
+            <a:ext cx="2514600" cy="292608"/>
+          </a:xfrm>
+          <a:prstGeom prst="rect">
+            <a:avLst/>
+          </a:prstGeom>
+          <a:noFill/>
+        </p:spPr>
+        <p:txBody>
+          <a:bodyPr wrap="square" anchor="ctr" lIns="0" rIns="0" tIns="0" bIns="0">
+            <a:spAutoFit/>
+          </a:bodyPr>
+          <a:lstStyle/>
+          <a:p>
+            <a:pPr algn="l">
+              <a:lnSpc>
+                <a:spcPct val="100000"/>
+              </a:lnSpc>
+              <a:spcBef>
+                <a:spcPts val="0"/>
+              </a:spcBef>
+              <a:spcAft>
+                <a:spcPts val="200"/>
+              </a:spcAft>
+            </a:pPr>
+            <a:r>
+              <a:rPr sz="1050" b="1">
+                <a:solidFill>
+                  <a:srgbClr val="E87A2B"/>
+                </a:solidFill>
+                <a:latin typeface="맑은 고딕"/>
+                <a:ea typeface="맑은 고딕"/>
+                <a:cs typeface="맑은 고딕"/>
+              </a:rPr>
+              <a:t>💡  MISSION E · 아이디어톤</a:t>
+            </a:r>
+          </a:p>
+        </p:txBody>
+      </p:sp>
+      <p:sp>
+        <p:nvSpPr>
+          <p:cNvPr id="36" name="TextBox 35"/>
+          <p:cNvSpPr txBox="1"/>
+          <p:nvPr/>
+        </p:nvSpPr>
+        <p:spPr>
+          <a:xfrm>
+            <a:off x="640080" y="7278624"/>
+            <a:ext cx="2514600" cy="603504"/>
+          </a:xfrm>
+          <a:prstGeom prst="rect">
+            <a:avLst/>
+          </a:prstGeom>
+          <a:noFill/>
+        </p:spPr>
+        <p:txBody>
+          <a:bodyPr wrap="square" anchor="t" lIns="0" rIns="0" tIns="0" bIns="0">
+            <a:spAutoFit/>
+          </a:bodyPr>
+          <a:lstStyle/>
+          <a:p>
+            <a:pPr algn="l">
+              <a:lnSpc>
+                <a:spcPct val="105000"/>
+              </a:lnSpc>
+              <a:spcBef>
+                <a:spcPts val="0"/>
+              </a:spcBef>
+              <a:spcAft>
+                <a:spcPts val="200"/>
+              </a:spcAft>
+            </a:pPr>
+            <a:r>
+              <a:rPr sz="1300" b="1">
+                <a:solidFill>
+                  <a:srgbClr val="0F2444"/>
+                </a:solidFill>
+                <a:latin typeface="맑은 고딕"/>
+                <a:ea typeface="맑은 고딕"/>
+                <a:cs typeface="맑은 고딕"/>
+              </a:rPr>
+              <a:t>있으면 좋겠다! 사내 문화·복지</a:t>
+            </a:r>
+          </a:p>
+        </p:txBody>
+      </p:sp>
+      <p:sp>
+        <p:nvSpPr>
+          <p:cNvPr id="37" name="Rectangle 36"/>
+          <p:cNvSpPr/>
+          <p:nvPr/>
+        </p:nvSpPr>
+        <p:spPr>
+          <a:xfrm>
+            <a:off x="640080" y="7991856"/>
+            <a:ext cx="1965960" cy="32004"/>
+          </a:xfrm>
+          <a:prstGeom prst="rect">
+            <a:avLst/>
+          </a:prstGeom>
+          <a:solidFill>
+            <a:srgbClr val="E87A2B"/>
+          </a:solidFill>
+          <a:ln>
+            <a:noFill/>
+          </a:ln>
+          <a:effectLst/>
+        </p:spPr>
+        <p:style>
+          <a:lnRef idx="1">
+            <a:schemeClr val="accent1"/>
+          </a:lnRef>
+          <a:fillRef idx="3">
+            <a:schemeClr val="accent1"/>
+          </a:fillRef>
+          <a:effectRef idx="2">
+            <a:schemeClr val="accent1"/>
+          </a:effectRef>
+          <a:fontRef idx="minor">
+            <a:schemeClr val="lt1"/>
+          </a:fontRef>
+        </p:style>
+        <p:txBody>
+          <a:bodyPr rtlCol="0" anchor="ctr"/>
+          <a:lstStyle/>
+          <a:p>
+            <a:pPr algn="ctr"/>
+          </a:p>
+        </p:txBody>
+      </p:sp>
+      <p:sp>
+        <p:nvSpPr>
+          <p:cNvPr id="38" name="TextBox 37"/>
+          <p:cNvSpPr txBox="1"/>
+          <p:nvPr/>
+        </p:nvSpPr>
+        <p:spPr>
+          <a:xfrm>
+            <a:off x="640080" y="8138160"/>
+            <a:ext cx="2514600" cy="603504"/>
+          </a:xfrm>
+          <a:prstGeom prst="rect">
+            <a:avLst/>
+          </a:prstGeom>
+          <a:noFill/>
+        </p:spPr>
+        <p:txBody>
+          <a:bodyPr wrap="square" anchor="t" lIns="0" rIns="0" tIns="0" bIns="0">
+            <a:spAutoFit/>
+          </a:bodyPr>
+          <a:lstStyle/>
+          <a:p>
+            <a:pPr algn="l">
+              <a:lnSpc>
+                <a:spcPct val="115000"/>
+              </a:lnSpc>
+              <a:spcBef>
+                <a:spcPts val="0"/>
+              </a:spcBef>
+              <a:spcAft>
+                <a:spcPts val="200"/>
+              </a:spcAft>
+            </a:pPr>
+            <a:r>
+              <a:rPr sz="1000" b="0">
+                <a:solidFill>
+                  <a:srgbClr val="5C6B80"/>
+                </a:solidFill>
+                <a:latin typeface="맑은 고딕"/>
+                <a:ea typeface="맑은 고딕"/>
+                <a:cs typeface="맑은 고딕"/>
+              </a:rPr>
+              <a:t>팀 토론으로 베스트 아이디어 1개 → 제안서 한 장</a:t>
+            </a:r>
+          </a:p>
+        </p:txBody>
+      </p:sp>
+      <p:sp>
+        <p:nvSpPr>
+          <p:cNvPr id="39" name="Rounded Rectangle 38"/>
+          <p:cNvSpPr/>
+          <p:nvPr/>
+        </p:nvSpPr>
+        <p:spPr>
+          <a:xfrm>
+            <a:off x="3520440" y="6675120"/>
+            <a:ext cx="2880360" cy="2103120"/>
+          </a:xfrm>
+          <a:prstGeom prst="roundRect">
+            <a:avLst>
+              <a:gd name="adj" fmla="val 5000"/>
+            </a:avLst>
+          </a:prstGeom>
+          <a:solidFill>
+            <a:srgbClr val="FFFFFF"/>
+          </a:solidFill>
+          <a:ln w="12700">
+            <a:solidFill>
+              <a:srgbClr val="D9E2EE"/>
+            </a:solidFill>
+          </a:ln>
+          <a:effectLst/>
+          <a:effectLst>
+            <a:outerShdw blurRad="80000" dist="38000" dir="5400000" rotWithShape="0">
+              <a:srgbClr val="1B2738">
+                <a:alpha val="18000"/>
+              </a:srgbClr>
+            </a:outerShdw>
+          </a:effectLst>
+        </p:spPr>
+        <p:style>
+          <a:lnRef idx="1">
+            <a:schemeClr val="accent1"/>
+          </a:lnRef>
+          <a:fillRef idx="3">
+            <a:schemeClr val="accent1"/>
+          </a:fillRef>
+          <a:effectRef idx="2">
+            <a:schemeClr val="accent1"/>
+          </a:effectRef>
+          <a:fontRef idx="minor">
+            <a:schemeClr val="lt1"/>
+          </a:fontRef>
+        </p:style>
+        <p:txBody>
+          <a:bodyPr rtlCol="0" anchor="ctr"/>
+          <a:lstStyle/>
+          <a:p>
+            <a:pPr algn="ctr"/>
+          </a:p>
+        </p:txBody>
+      </p:sp>
+      <p:sp>
+        <p:nvSpPr>
+          <p:cNvPr id="40" name="Round Same Side Corner Rectangle 39"/>
+          <p:cNvSpPr/>
+          <p:nvPr/>
+        </p:nvSpPr>
+        <p:spPr>
+          <a:xfrm>
+            <a:off x="3520440" y="6675120"/>
+            <a:ext cx="2880360" cy="457200"/>
+          </a:xfrm>
+          <a:prstGeom prst="round2SameRect">
+            <a:avLst>
+              <a:gd name="adj1" fmla="val 35000"/>
+              <a:gd name="adj2" fmla="val 0"/>
+            </a:avLst>
+          </a:prstGeom>
+          <a:solidFill>
+            <a:srgbClr val="FCF0E4"/>
+          </a:solidFill>
+          <a:ln>
+            <a:noFill/>
+          </a:ln>
+          <a:effectLst/>
+        </p:spPr>
+        <p:style>
+          <a:lnRef idx="1">
+            <a:schemeClr val="accent1"/>
+          </a:lnRef>
+          <a:fillRef idx="3">
+            <a:schemeClr val="accent1"/>
+          </a:fillRef>
+          <a:effectRef idx="2">
+            <a:schemeClr val="accent1"/>
+          </a:effectRef>
+          <a:fontRef idx="minor">
+            <a:schemeClr val="lt1"/>
+          </a:fontRef>
+        </p:style>
+        <p:txBody>
+          <a:bodyPr rtlCol="0" anchor="ctr"/>
+          <a:lstStyle/>
+          <a:p>
+            <a:pPr algn="ctr"/>
+          </a:p>
+        </p:txBody>
+      </p:sp>
+      <p:sp>
+        <p:nvSpPr>
+          <p:cNvPr id="41" name="TextBox 40"/>
+          <p:cNvSpPr txBox="1"/>
+          <p:nvPr/>
+        </p:nvSpPr>
+        <p:spPr>
+          <a:xfrm>
+            <a:off x="3703320" y="6757416"/>
+            <a:ext cx="2514600" cy="292608"/>
+          </a:xfrm>
+          <a:prstGeom prst="rect">
+            <a:avLst/>
+          </a:prstGeom>
+          <a:noFill/>
+        </p:spPr>
+        <p:txBody>
+          <a:bodyPr wrap="square" anchor="ctr" lIns="0" rIns="0" tIns="0" bIns="0">
+            <a:spAutoFit/>
+          </a:bodyPr>
+          <a:lstStyle/>
+          <a:p>
+            <a:pPr algn="l">
+              <a:lnSpc>
+                <a:spcPct val="100000"/>
+              </a:lnSpc>
+              <a:spcBef>
+                <a:spcPts val="0"/>
+              </a:spcBef>
+              <a:spcAft>
+                <a:spcPts val="200"/>
+              </a:spcAft>
+            </a:pPr>
+            <a:r>
+              <a:rPr sz="1050" b="1">
+                <a:solidFill>
+                  <a:srgbClr val="E87A2B"/>
+                </a:solidFill>
+                <a:latin typeface="맑은 고딕"/>
+                <a:ea typeface="맑은 고딕"/>
+                <a:cs typeface="맑은 고딕"/>
+              </a:rPr>
+              <a:t>📣  MISSION F · 홍보기획</a:t>
+            </a:r>
+          </a:p>
+        </p:txBody>
+      </p:sp>
+      <p:sp>
+        <p:nvSpPr>
+          <p:cNvPr id="42" name="TextBox 41"/>
+          <p:cNvSpPr txBox="1"/>
+          <p:nvPr/>
+        </p:nvSpPr>
+        <p:spPr>
+          <a:xfrm>
+            <a:off x="3703320" y="7278624"/>
+            <a:ext cx="2514600" cy="603504"/>
+          </a:xfrm>
+          <a:prstGeom prst="rect">
+            <a:avLst/>
+          </a:prstGeom>
+          <a:noFill/>
+        </p:spPr>
+        <p:txBody>
+          <a:bodyPr wrap="square" anchor="t" lIns="0" rIns="0" tIns="0" bIns="0">
+            <a:spAutoFit/>
+          </a:bodyPr>
+          <a:lstStyle/>
+          <a:p>
+            <a:pPr algn="l">
+              <a:lnSpc>
+                <a:spcPct val="105000"/>
+              </a:lnSpc>
+              <a:spcBef>
+                <a:spcPts val="0"/>
+              </a:spcBef>
+              <a:spcAft>
+                <a:spcPts val="200"/>
+              </a:spcAft>
+            </a:pPr>
+            <a:r>
+              <a:rPr sz="1300" b="1">
+                <a:solidFill>
+                  <a:srgbClr val="0F2444"/>
+                </a:solidFill>
+                <a:latin typeface="맑은 고딕"/>
+                <a:ea typeface="맑은 고딕"/>
+                <a:cs typeface="맑은 고딕"/>
+              </a:rPr>
+              <a:t>MZ세대 겨냥 회사 SNS 홍보</a:t>
+            </a:r>
+          </a:p>
+        </p:txBody>
+      </p:sp>
+      <p:sp>
+        <p:nvSpPr>
+          <p:cNvPr id="43" name="Rectangle 42"/>
+          <p:cNvSpPr/>
+          <p:nvPr/>
+        </p:nvSpPr>
+        <p:spPr>
+          <a:xfrm>
+            <a:off x="3703320" y="7991856"/>
+            <a:ext cx="1965960" cy="32004"/>
+          </a:xfrm>
+          <a:prstGeom prst="rect">
+            <a:avLst/>
+          </a:prstGeom>
+          <a:solidFill>
+            <a:srgbClr val="E87A2B"/>
+          </a:solidFill>
+          <a:ln>
+            <a:noFill/>
+          </a:ln>
+          <a:effectLst/>
+        </p:spPr>
+        <p:style>
+          <a:lnRef idx="1">
+            <a:schemeClr val="accent1"/>
+          </a:lnRef>
+          <a:fillRef idx="3">
+            <a:schemeClr val="accent1"/>
+          </a:fillRef>
+          <a:effectRef idx="2">
+            <a:schemeClr val="accent1"/>
+          </a:effectRef>
+          <a:fontRef idx="minor">
+            <a:schemeClr val="lt1"/>
+          </a:fontRef>
+        </p:style>
+        <p:txBody>
+          <a:bodyPr rtlCol="0" anchor="ctr"/>
+          <a:lstStyle/>
+          <a:p>
+            <a:pPr algn="ctr"/>
+          </a:p>
+        </p:txBody>
+      </p:sp>
+      <p:sp>
+        <p:nvSpPr>
+          <p:cNvPr id="44" name="TextBox 43"/>
+          <p:cNvSpPr txBox="1"/>
+          <p:nvPr/>
+        </p:nvSpPr>
+        <p:spPr>
+          <a:xfrm>
+            <a:off x="3703320" y="8138160"/>
+            <a:ext cx="2514600" cy="603504"/>
+          </a:xfrm>
+          <a:prstGeom prst="rect">
+            <a:avLst/>
+          </a:prstGeom>
+          <a:noFill/>
+        </p:spPr>
+        <p:txBody>
+          <a:bodyPr wrap="square" anchor="t" lIns="0" rIns="0" tIns="0" bIns="0">
+            <a:spAutoFit/>
+          </a:bodyPr>
+          <a:lstStyle/>
+          <a:p>
+            <a:pPr algn="l">
+              <a:lnSpc>
+                <a:spcPct val="115000"/>
+              </a:lnSpc>
+              <a:spcBef>
+                <a:spcPts val="0"/>
+              </a:spcBef>
+              <a:spcAft>
+                <a:spcPts val="200"/>
+              </a:spcAft>
+            </a:pPr>
+            <a:r>
+              <a:rPr sz="1000" b="0">
+                <a:solidFill>
+                  <a:srgbClr val="5C6B80"/>
+                </a:solidFill>
+                <a:latin typeface="맑은 고딕"/>
+                <a:ea typeface="맑은 고딕"/>
+                <a:cs typeface="맑은 고딕"/>
+              </a:rPr>
+              <a:t>회사 매력 발굴 → 콘텐츠 컨셉·기대효과 한 장</a:t>
+            </a:r>
+          </a:p>
+        </p:txBody>
+      </p:sp>
+      <p:sp>
+        <p:nvSpPr>
+          <p:cNvPr id="45" name="Rectangle 44"/>
           <p:cNvSpPr/>
           <p:nvPr/>
         </p:nvSpPr>
@@ -32177,7 +32773,7 @@
       </p:sp>
       <p:sp>
         <p:nvSpPr>
-          <p:cNvPr id="34" name="Rectangle 33"/>
+          <p:cNvPr id="46" name="Rectangle 45"/>
           <p:cNvSpPr/>
           <p:nvPr/>
         </p:nvSpPr>
@@ -32221,7 +32817,7 @@
       </p:sp>
       <p:sp>
         <p:nvSpPr>
-          <p:cNvPr id="35" name="TextBox 34"/>
+          <p:cNvPr id="47" name="TextBox 46"/>
           <p:cNvSpPr txBox="1"/>
           <p:nvPr/>
         </p:nvSpPr>
